--- a/docs/slides/pptx/M6_페이지구성실무.pptx
+++ b/docs/slides/pptx/M6_페이지구성실무.pptx
@@ -3148,7 +3148,7 @@
           </a:fontRef>
         </p:style>
         <p:txBody>
-          <a:bodyPr rtlCol="0" anchor="ctr"/>
+          <a:bodyPr rtlCol="0" anchor="t" wrap="square"/>
           <a:lstStyle/>
           <a:p>
             <a:pPr algn="ctr"/>
@@ -3192,7 +3192,7 @@
           </a:fontRef>
         </p:style>
         <p:txBody>
-          <a:bodyPr rtlCol="0" anchor="ctr"/>
+          <a:bodyPr rtlCol="0" anchor="t" wrap="square"/>
           <a:lstStyle/>
           <a:p>
             <a:pPr algn="ctr"/>
@@ -3236,7 +3236,7 @@
           </a:fontRef>
         </p:style>
         <p:txBody>
-          <a:bodyPr rtlCol="0" anchor="ctr"/>
+          <a:bodyPr rtlCol="0" anchor="t" wrap="square"/>
           <a:lstStyle/>
           <a:p>
             <a:pPr algn="ctr"/>
@@ -3280,7 +3280,7 @@
           </a:fontRef>
         </p:style>
         <p:txBody>
-          <a:bodyPr rtlCol="0" anchor="ctr"/>
+          <a:bodyPr rtlCol="0" anchor="t" wrap="square"/>
           <a:lstStyle/>
           <a:p>
             <a:pPr algn="ctr"/>
@@ -3324,7 +3324,7 @@
           </a:fontRef>
         </p:style>
         <p:txBody>
-          <a:bodyPr rtlCol="0" anchor="ctr"/>
+          <a:bodyPr rtlCol="0" anchor="t" wrap="square"/>
           <a:lstStyle/>
           <a:p>
             <a:pPr algn="ctr"/>
@@ -3368,7 +3368,7 @@
           </a:fontRef>
         </p:style>
         <p:txBody>
-          <a:bodyPr rtlCol="0" anchor="ctr"/>
+          <a:bodyPr rtlCol="0" anchor="t" wrap="square"/>
           <a:lstStyle/>
           <a:p>
             <a:pPr algn="ctr"/>
@@ -3412,7 +3412,7 @@
           </a:fontRef>
         </p:style>
         <p:txBody>
-          <a:bodyPr rtlCol="0" anchor="ctr"/>
+          <a:bodyPr rtlCol="0" anchor="t" wrap="square"/>
           <a:lstStyle/>
           <a:p>
             <a:pPr algn="ctr"/>
@@ -3624,7 +3624,7 @@
           </a:fontRef>
         </p:style>
         <p:txBody>
-          <a:bodyPr rtlCol="0" anchor="ctr"/>
+          <a:bodyPr rtlCol="0" anchor="t" wrap="square"/>
           <a:lstStyle/>
           <a:p>
             <a:pPr algn="ctr"/>
@@ -3926,7 +3926,7 @@
           </a:fontRef>
         </p:style>
         <p:txBody>
-          <a:bodyPr rtlCol="0" anchor="ctr"/>
+          <a:bodyPr rtlCol="0" anchor="t" wrap="square"/>
           <a:lstStyle/>
           <a:p>
             <a:pPr algn="ctr"/>
@@ -4230,7 +4230,7 @@
           </a:fontRef>
         </p:style>
         <p:txBody>
-          <a:bodyPr rtlCol="0" anchor="ctr"/>
+          <a:bodyPr rtlCol="0" anchor="t" wrap="square"/>
           <a:lstStyle/>
           <a:p>
             <a:pPr algn="ctr"/>
@@ -4345,10 +4345,10 @@
           </a:fontRef>
         </p:style>
         <p:txBody>
-          <a:bodyPr rtlCol="0" anchor="ctr" wrap="square" lIns="411480" rIns="365760" tIns="502920" bIns="320040"/>
-          <a:lstStyle/>
-          <a:p>
-            <a:pPr algn="ctr">
+          <a:bodyPr rtlCol="0" anchor="t" wrap="square" lIns="411480" rIns="365760" tIns="502920" bIns="320040"/>
+          <a:lstStyle/>
+          <a:p>
+            <a:pPr algn="l">
               <a:lnSpc>
                 <a:spcPct val="115000"/>
               </a:lnSpc>
@@ -4372,7 +4372,7 @@
             </a:r>
           </a:p>
           <a:p>
-            <a:pPr>
+            <a:pPr algn="l">
               <a:lnSpc>
                 <a:spcPct val="115000"/>
               </a:lnSpc>
@@ -4396,7 +4396,7 @@
             </a:r>
           </a:p>
           <a:p>
-            <a:pPr>
+            <a:pPr algn="l">
               <a:lnSpc>
                 <a:spcPct val="115000"/>
               </a:lnSpc>
@@ -4458,7 +4458,7 @@
           </a:fontRef>
         </p:style>
         <p:txBody>
-          <a:bodyPr rtlCol="0" anchor="ctr"/>
+          <a:bodyPr rtlCol="0" anchor="t" wrap="square"/>
           <a:lstStyle/>
           <a:p>
             <a:pPr algn="ctr"/>
@@ -4528,7 +4528,7 @@
           </a:fontRef>
         </p:style>
         <p:txBody>
-          <a:bodyPr rtlCol="0" anchor="ctr"/>
+          <a:bodyPr rtlCol="0" anchor="t" wrap="square"/>
           <a:lstStyle/>
           <a:p>
             <a:pPr algn="ctr"/>
@@ -4643,7 +4643,7 @@
           </a:fontRef>
         </p:style>
         <p:txBody>
-          <a:bodyPr rtlCol="0" anchor="ctr" wrap="square" lIns="365760" rIns="365760" tIns="228600" bIns="182880"/>
+          <a:bodyPr rtlCol="0" anchor="t" wrap="square" lIns="365760" rIns="365760" tIns="228600" bIns="182880"/>
           <a:lstStyle/>
           <a:p>
             <a:pPr algn="l">
@@ -4778,7 +4778,7 @@
           </a:fontRef>
         </p:style>
         <p:txBody>
-          <a:bodyPr rtlCol="0" anchor="ctr" wrap="square" lIns="365760" rIns="365760" tIns="201168" bIns="182880"/>
+          <a:bodyPr rtlCol="0" anchor="t" wrap="square" lIns="365760" rIns="365760" tIns="201168" bIns="182880"/>
           <a:lstStyle/>
           <a:p>
             <a:pPr algn="l">
@@ -4880,7 +4880,7 @@
           </a:fontRef>
         </p:style>
         <p:txBody>
-          <a:bodyPr rtlCol="0" anchor="ctr"/>
+          <a:bodyPr rtlCol="0" anchor="t" wrap="square"/>
           <a:lstStyle/>
           <a:p>
             <a:pPr algn="ctr"/>
@@ -5182,7 +5182,7 @@
           </a:fontRef>
         </p:style>
         <p:txBody>
-          <a:bodyPr rtlCol="0" anchor="ctr"/>
+          <a:bodyPr rtlCol="0" anchor="t" wrap="square"/>
           <a:lstStyle/>
           <a:p>
             <a:pPr algn="ctr"/>
@@ -5451,7 +5451,7 @@
           </a:fontRef>
         </p:style>
         <p:txBody>
-          <a:bodyPr rtlCol="0" anchor="ctr"/>
+          <a:bodyPr rtlCol="0" anchor="t" wrap="square"/>
           <a:lstStyle/>
           <a:p>
             <a:pPr algn="ctr"/>
@@ -5651,7 +5651,7 @@
           </a:fontRef>
         </p:style>
         <p:txBody>
-          <a:bodyPr rtlCol="0" anchor="ctr"/>
+          <a:bodyPr rtlCol="0" anchor="t" wrap="square"/>
           <a:lstStyle/>
           <a:p>
             <a:pPr algn="ctr"/>
@@ -5885,7 +5885,7 @@
           </a:fontRef>
         </p:style>
         <p:txBody>
-          <a:bodyPr rtlCol="0" anchor="ctr"/>
+          <a:bodyPr rtlCol="0" anchor="t" wrap="square"/>
           <a:lstStyle/>
           <a:p>
             <a:pPr algn="ctr"/>
@@ -6119,7 +6119,7 @@
           </a:fontRef>
         </p:style>
         <p:txBody>
-          <a:bodyPr rtlCol="0" anchor="ctr"/>
+          <a:bodyPr rtlCol="0" anchor="t" wrap="square"/>
           <a:lstStyle/>
           <a:p>
             <a:pPr algn="ctr"/>
@@ -6284,7 +6284,7 @@
           </a:fontRef>
         </p:style>
         <p:txBody>
-          <a:bodyPr rtlCol="0" anchor="ctr"/>
+          <a:bodyPr rtlCol="0" anchor="t" wrap="square"/>
           <a:lstStyle/>
           <a:p>
             <a:pPr algn="ctr"/>
@@ -6586,7 +6586,7 @@
           </a:fontRef>
         </p:style>
         <p:txBody>
-          <a:bodyPr rtlCol="0" anchor="ctr"/>
+          <a:bodyPr rtlCol="0" anchor="t" wrap="square"/>
           <a:lstStyle/>
           <a:p>
             <a:pPr algn="ctr"/>
@@ -6890,7 +6890,7 @@
           </a:fontRef>
         </p:style>
         <p:txBody>
-          <a:bodyPr rtlCol="0" anchor="ctr"/>
+          <a:bodyPr rtlCol="0" anchor="t" wrap="square"/>
           <a:lstStyle/>
           <a:p>
             <a:pPr algn="ctr"/>
@@ -7005,10 +7005,10 @@
           </a:fontRef>
         </p:style>
         <p:txBody>
-          <a:bodyPr rtlCol="0" anchor="ctr" wrap="square" lIns="411480" rIns="365760" tIns="502920" bIns="320040"/>
-          <a:lstStyle/>
-          <a:p>
-            <a:pPr algn="ctr">
+          <a:bodyPr rtlCol="0" anchor="t" wrap="square" lIns="411480" rIns="365760" tIns="502920" bIns="320040"/>
+          <a:lstStyle/>
+          <a:p>
+            <a:pPr algn="l">
               <a:lnSpc>
                 <a:spcPct val="115000"/>
               </a:lnSpc>
@@ -7032,7 +7032,7 @@
             </a:r>
           </a:p>
           <a:p>
-            <a:pPr>
+            <a:pPr algn="l">
               <a:lnSpc>
                 <a:spcPct val="115000"/>
               </a:lnSpc>
@@ -7056,7 +7056,7 @@
             </a:r>
           </a:p>
           <a:p>
-            <a:pPr>
+            <a:pPr algn="l">
               <a:lnSpc>
                 <a:spcPct val="115000"/>
               </a:lnSpc>
@@ -7080,7 +7080,7 @@
             </a:r>
           </a:p>
           <a:p>
-            <a:pPr>
+            <a:pPr algn="l">
               <a:lnSpc>
                 <a:spcPct val="115000"/>
               </a:lnSpc>
@@ -7104,7 +7104,7 @@
             </a:r>
           </a:p>
           <a:p>
-            <a:pPr>
+            <a:pPr algn="l">
               <a:lnSpc>
                 <a:spcPct val="115000"/>
               </a:lnSpc>
@@ -7166,7 +7166,7 @@
           </a:fontRef>
         </p:style>
         <p:txBody>
-          <a:bodyPr rtlCol="0" anchor="ctr"/>
+          <a:bodyPr rtlCol="0" anchor="t" wrap="square"/>
           <a:lstStyle/>
           <a:p>
             <a:pPr algn="ctr"/>
@@ -7236,7 +7236,7 @@
           </a:fontRef>
         </p:style>
         <p:txBody>
-          <a:bodyPr rtlCol="0" anchor="ctr"/>
+          <a:bodyPr rtlCol="0" anchor="t" wrap="square"/>
           <a:lstStyle/>
           <a:p>
             <a:pPr algn="ctr"/>
@@ -7351,7 +7351,7 @@
           </a:fontRef>
         </p:style>
         <p:txBody>
-          <a:bodyPr rtlCol="0" anchor="ctr" wrap="square" lIns="365760" rIns="365760" tIns="228600" bIns="182880"/>
+          <a:bodyPr rtlCol="0" anchor="t" wrap="square" lIns="365760" rIns="365760" tIns="228600" bIns="182880"/>
           <a:lstStyle/>
           <a:p>
             <a:pPr algn="l">
@@ -7486,7 +7486,7 @@
           </a:fontRef>
         </p:style>
         <p:txBody>
-          <a:bodyPr rtlCol="0" anchor="ctr" wrap="square" lIns="365760" rIns="365760" tIns="201168" bIns="182880"/>
+          <a:bodyPr rtlCol="0" anchor="t" wrap="square" lIns="365760" rIns="365760" tIns="201168" bIns="182880"/>
           <a:lstStyle/>
           <a:p>
             <a:pPr algn="l">
@@ -7588,7 +7588,7 @@
           </a:fontRef>
         </p:style>
         <p:txBody>
-          <a:bodyPr rtlCol="0" anchor="ctr"/>
+          <a:bodyPr rtlCol="0" anchor="t" wrap="square"/>
           <a:lstStyle/>
           <a:p>
             <a:pPr algn="ctr"/>
